--- a/ppt資料/2分プレゼン_v2.pptx
+++ b/ppt資料/2分プレゼン_v2.pptx
@@ -5,13 +5,13 @@
     <p:sldMasterId id="2147483648" r:id="rId1"/>
   </p:sldMasterIdLst>
   <p:sldIdLst>
-    <p:sldId id="256" r:id="rId7"/>
-    <p:sldId id="257" r:id="rId8"/>
-    <p:sldId id="258" r:id="rId9"/>
-    <p:sldId id="259" r:id="rId10"/>
-    <p:sldId id="260" r:id="rId11"/>
+    <p:sldId id="256" r:id="rId2"/>
+    <p:sldId id="257" r:id="rId3"/>
+    <p:sldId id="258" r:id="rId4"/>
+    <p:sldId id="259" r:id="rId5"/>
+    <p:sldId id="260" r:id="rId6"/>
   </p:sldIdLst>
-  <p:sldSz cx="12191695" cy="6858000" type="screen4x3"/>
+  <p:sldSz cx="12192000" cy="6858000"/>
   <p:notesSz cx="6858000" cy="9144000"/>
   <p:defaultTextStyle>
     <a:defPPr>
@@ -108,18 +108,39 @@
       </a:defRPr>
     </a:lvl9pPr>
   </p:defaultTextStyle>
+  <p:extLst>
+    <p:ext uri="{EFAFB233-063F-42B5-8137-9DF3F51BA10A}">
+      <p15:sldGuideLst xmlns:p15="http://schemas.microsoft.com/office/powerpoint/2012/main">
+        <p15:guide id="1" orient="horz" pos="2160">
+          <p15:clr>
+            <a:srgbClr val="A4A3A4"/>
+          </p15:clr>
+        </p15:guide>
+        <p15:guide id="2" pos="2880">
+          <p15:clr>
+            <a:srgbClr val="A4A3A4"/>
+          </p15:clr>
+        </p15:guide>
+      </p15:sldGuideLst>
+    </p:ext>
+  </p:extLst>
 </p:presentation>
 </file>
 
 <file path=ppt/charts/chart1.xml><?xml version="1.0" encoding="utf-8"?>
-<c:chartSpace xmlns:c="http://schemas.openxmlformats.org/drawingml/2006/chart" xmlns:a="http://schemas.openxmlformats.org/drawingml/2006/main" xmlns:r="http://schemas.openxmlformats.org/officeDocument/2006/relationships">
+<c:chartSpace xmlns:c="http://schemas.openxmlformats.org/drawingml/2006/chart" xmlns:a="http://schemas.openxmlformats.org/drawingml/2006/main" xmlns:r="http://schemas.openxmlformats.org/officeDocument/2006/relationships" xmlns:c16r2="http://schemas.microsoft.com/office/drawing/2015/06/chart">
   <c:date1904 val="0"/>
+  <c:lang val="ja-JP"/>
+  <c:roundedCorners val="1"/>
+  <c:style val="2"/>
   <c:chart>
     <c:autoTitleDeleted val="1"/>
     <c:plotArea>
+      <c:layout/>
       <c:barChart>
         <c:barDir val="col"/>
         <c:grouping val="clustered"/>
+        <c:varyColors val="1"/>
         <c:ser>
           <c:idx val="0"/>
           <c:order val="0"/>
@@ -134,22 +155,77 @@
               </c:strCache>
             </c:strRef>
           </c:tx>
+          <c:invertIfNegative val="1"/>
           <c:dPt>
             <c:idx val="0"/>
+            <c:invertIfNegative val="1"/>
+            <c:bubble3D val="0"/>
             <c:spPr>
               <a:solidFill>
                 <a:srgbClr val="86B6EF"/>
               </a:solidFill>
             </c:spPr>
+            <c:extLst>
+              <c:ext xmlns:c16="http://schemas.microsoft.com/office/drawing/2014/chart" uri="{C3380CC4-5D6E-409C-BE32-E72D297353CC}">
+                <c16:uniqueId val="{00000001-B9EC-4DAA-9124-49C1C467D889}"/>
+              </c:ext>
+            </c:extLst>
           </c:dPt>
           <c:dPt>
             <c:idx val="1"/>
+            <c:invertIfNegative val="1"/>
+            <c:bubble3D val="0"/>
             <c:spPr>
               <a:solidFill>
                 <a:srgbClr val="1C5CAB"/>
               </a:solidFill>
             </c:spPr>
+            <c:extLst>
+              <c:ext xmlns:c16="http://schemas.microsoft.com/office/drawing/2014/chart" uri="{C3380CC4-5D6E-409C-BE32-E72D297353CC}">
+                <c16:uniqueId val="{00000003-B9EC-4DAA-9124-49C1C467D889}"/>
+              </c:ext>
+            </c:extLst>
           </c:dPt>
+          <c:dLbls>
+            <c:numFmt formatCode="0.00&quot;%&quot;" sourceLinked="0"/>
+            <c:spPr>
+              <a:noFill/>
+              <a:ln>
+                <a:noFill/>
+              </a:ln>
+              <a:effectLst/>
+            </c:spPr>
+            <c:txPr>
+              <a:bodyPr/>
+              <a:lstStyle/>
+              <a:p>
+                <a:pPr>
+                  <a:defRPr sz="1700" b="1">
+                    <a:solidFill>
+                      <a:srgbClr val="0D366B"/>
+                    </a:solidFill>
+                    <a:latin typeface="Meiryo UI"/>
+                    <a:ea typeface="Meiryo UI"/>
+                    <a:cs typeface="Meiryo UI"/>
+                  </a:defRPr>
+                </a:pPr>
+                <a:endParaRPr lang="ja-JP"/>
+              </a:p>
+            </c:txPr>
+            <c:dLblPos val="outEnd"/>
+            <c:showLegendKey val="0"/>
+            <c:showVal val="1"/>
+            <c:showCatName val="0"/>
+            <c:showSerName val="0"/>
+            <c:showPercent val="0"/>
+            <c:showBubbleSize val="0"/>
+            <c:showLeaderLines val="0"/>
+            <c:extLst>
+              <c:ext xmlns:c15="http://schemas.microsoft.com/office/drawing/2012/chart" uri="{CE6537A1-D6FC-4f65-9D91-7224C49458BB}">
+                <c15:showLeaderLines val="0"/>
+              </c:ext>
+            </c:extLst>
+          </c:dLbls>
           <c:cat>
             <c:strRef>
               <c:f>Sheet1!$A$2:$A$3</c:f>
@@ -179,25 +255,13 @@
               </c:numCache>
             </c:numRef>
           </c:val>
+          <c:extLst>
+            <c:ext xmlns:c16="http://schemas.microsoft.com/office/drawing/2014/chart" uri="{C3380CC4-5D6E-409C-BE32-E72D297353CC}">
+              <c16:uniqueId val="{00000004-B9EC-4DAA-9124-49C1C467D889}"/>
+            </c:ext>
+          </c:extLst>
         </c:ser>
         <c:dLbls>
-          <c:numFmt formatCode="0.00&quot;%&quot;" sourceLinked="0"/>
-          <c:txPr>
-            <a:bodyPr/>
-            <a:lstStyle/>
-            <a:p>
-              <a:pPr>
-                <a:defRPr sz="1700" b="1">
-                  <a:solidFill>
-                    <a:srgbClr val="0D366B"/>
-                  </a:solidFill>
-                  <a:latin typeface="Meiryo UI"/>
-                  <a:ea typeface="Meiryo UI"/>
-                  <a:cs typeface="Meiryo UI"/>
-                </a:defRPr>
-              </a:pPr>
-            </a:p>
-          </c:txPr>
           <c:dLblPos val="outEnd"/>
           <c:showLegendKey val="0"/>
           <c:showVal val="1"/>
@@ -205,9 +269,8 @@
           <c:showSerName val="0"/>
           <c:showPercent val="0"/>
           <c:showBubbleSize val="0"/>
-          <c:showLeaderLines val="1"/>
         </c:dLbls>
-        <c:gapWidth/>
+        <c:gapWidth val="150"/>
         <c:axId val="-2068027336"/>
         <c:axId val="-2113994440"/>
       </c:barChart>
@@ -218,6 +281,7 @@
         </c:scaling>
         <c:delete val="0"/>
         <c:axPos val="b"/>
+        <c:numFmt formatCode="General" sourceLinked="0"/>
         <c:majorTickMark val="out"/>
         <c:minorTickMark val="none"/>
         <c:tickLblPos val="nextTo"/>
@@ -237,17 +301,23 @@
       </c:catAx>
       <c:valAx>
         <c:axId val="-2113994440"/>
-        <c:scaling/>
-        <c:delete/>
+        <c:scaling>
+          <c:orientation val="minMax"/>
+        </c:scaling>
+        <c:delete val="1"/>
         <c:axPos val="l"/>
+        <c:numFmt formatCode="General" sourceLinked="1"/>
         <c:majorTickMark val="out"/>
         <c:minorTickMark val="none"/>
         <c:tickLblPos val="nextTo"/>
         <c:crossAx val="-2068027336"/>
         <c:crosses val="autoZero"/>
+        <c:crossBetween val="between"/>
       </c:valAx>
     </c:plotArea>
+    <c:plotVisOnly val="1"/>
     <c:dispBlanksAs val="gap"/>
+    <c:showDLblsOverMax val="1"/>
   </c:chart>
   <c:txPr>
     <a:bodyPr/>
@@ -263,11 +333,7 @@
           <a:cs typeface="Meiryo UI"/>
         </a:defRPr>
       </a:pPr>
-      <a:endParaRPr lang="en-US">
-        <a:latin typeface="Meiryo UI"/>
-        <a:ea typeface="Meiryo UI"/>
-        <a:cs typeface="Meiryo UI"/>
-      </a:endParaRPr>
+      <a:endParaRPr lang="en-US"/>
     </a:p>
   </c:txPr>
   <c:externalData r:id="rId1">
@@ -314,10 +380,9 @@
           <a:lstStyle/>
           <a:p>
             <a:r>
-              <a:rPr lang="en-US" smtClean="0"/>
+              <a:rPr lang="en-US"/>
               <a:t>Click to edit Master title style</a:t>
             </a:r>
-            <a:endParaRPr lang="en-US"/>
           </a:p>
         </p:txBody>
       </p:sp>
@@ -433,10 +498,9 @@
           </a:lstStyle>
           <a:p>
             <a:r>
-              <a:rPr lang="en-US" smtClean="0"/>
+              <a:rPr lang="en-US"/>
               <a:t>Click to edit Master subtitle style</a:t>
             </a:r>
-            <a:endParaRPr lang="en-US"/>
           </a:p>
         </p:txBody>
       </p:sp>
@@ -457,7 +521,7 @@
           <a:p>
             <a:fld id="{5BCAD085-E8A6-8845-BD4E-CB4CCA059FC4}" type="datetimeFigureOut">
               <a:rPr lang="en-US" smtClean="0"/>
-              <a:t>1/27/13</a:t>
+              <a:t>8/23/2026</a:t>
             </a:fld>
             <a:endParaRPr lang="en-US"/>
           </a:p>
@@ -551,10 +615,9 @@
           <a:lstStyle/>
           <a:p>
             <a:r>
-              <a:rPr lang="en-US" smtClean="0"/>
+              <a:rPr lang="en-US"/>
               <a:t>Click to edit Master title style</a:t>
             </a:r>
-            <a:endParaRPr lang="en-US"/>
           </a:p>
         </p:txBody>
       </p:sp>
@@ -575,38 +638,37 @@
           <a:p>
             <a:pPr lvl="0"/>
             <a:r>
-              <a:rPr lang="en-US" smtClean="0"/>
+              <a:rPr lang="en-US"/>
               <a:t>Click to edit Master text styles</a:t>
             </a:r>
           </a:p>
           <a:p>
             <a:pPr lvl="1"/>
             <a:r>
-              <a:rPr lang="en-US" smtClean="0"/>
+              <a:rPr lang="en-US"/>
               <a:t>Second level</a:t>
             </a:r>
           </a:p>
           <a:p>
             <a:pPr lvl="2"/>
             <a:r>
-              <a:rPr lang="en-US" smtClean="0"/>
+              <a:rPr lang="en-US"/>
               <a:t>Third level</a:t>
             </a:r>
           </a:p>
           <a:p>
             <a:pPr lvl="3"/>
             <a:r>
-              <a:rPr lang="en-US" smtClean="0"/>
+              <a:rPr lang="en-US"/>
               <a:t>Fourth level</a:t>
             </a:r>
           </a:p>
           <a:p>
             <a:pPr lvl="4"/>
             <a:r>
-              <a:rPr lang="en-US" smtClean="0"/>
+              <a:rPr lang="en-US"/>
               <a:t>Fifth level</a:t>
             </a:r>
-            <a:endParaRPr lang="en-US"/>
           </a:p>
         </p:txBody>
       </p:sp>
@@ -627,7 +689,7 @@
           <a:p>
             <a:fld id="{5BCAD085-E8A6-8845-BD4E-CB4CCA059FC4}" type="datetimeFigureOut">
               <a:rPr lang="en-US" smtClean="0"/>
-              <a:t>1/27/13</a:t>
+              <a:t>8/23/2026</a:t>
             </a:fld>
             <a:endParaRPr lang="en-US"/>
           </a:p>
@@ -726,10 +788,9 @@
           <a:lstStyle/>
           <a:p>
             <a:r>
-              <a:rPr lang="en-US" smtClean="0"/>
+              <a:rPr lang="en-US"/>
               <a:t>Click to edit Master title style</a:t>
             </a:r>
-            <a:endParaRPr lang="en-US"/>
           </a:p>
         </p:txBody>
       </p:sp>
@@ -755,38 +816,37 @@
           <a:p>
             <a:pPr lvl="0"/>
             <a:r>
-              <a:rPr lang="en-US" smtClean="0"/>
+              <a:rPr lang="en-US"/>
               <a:t>Click to edit Master text styles</a:t>
             </a:r>
           </a:p>
           <a:p>
             <a:pPr lvl="1"/>
             <a:r>
-              <a:rPr lang="en-US" smtClean="0"/>
+              <a:rPr lang="en-US"/>
               <a:t>Second level</a:t>
             </a:r>
           </a:p>
           <a:p>
             <a:pPr lvl="2"/>
             <a:r>
-              <a:rPr lang="en-US" smtClean="0"/>
+              <a:rPr lang="en-US"/>
               <a:t>Third level</a:t>
             </a:r>
           </a:p>
           <a:p>
             <a:pPr lvl="3"/>
             <a:r>
-              <a:rPr lang="en-US" smtClean="0"/>
+              <a:rPr lang="en-US"/>
               <a:t>Fourth level</a:t>
             </a:r>
           </a:p>
           <a:p>
             <a:pPr lvl="4"/>
             <a:r>
-              <a:rPr lang="en-US" smtClean="0"/>
+              <a:rPr lang="en-US"/>
               <a:t>Fifth level</a:t>
             </a:r>
-            <a:endParaRPr lang="en-US"/>
           </a:p>
         </p:txBody>
       </p:sp>
@@ -807,7 +867,7 @@
           <a:p>
             <a:fld id="{5BCAD085-E8A6-8845-BD4E-CB4CCA059FC4}" type="datetimeFigureOut">
               <a:rPr lang="en-US" smtClean="0"/>
-              <a:t>1/27/13</a:t>
+              <a:t>8/23/2026</a:t>
             </a:fld>
             <a:endParaRPr lang="en-US"/>
           </a:p>
@@ -901,10 +961,9 @@
           <a:lstStyle/>
           <a:p>
             <a:r>
-              <a:rPr lang="en-US" smtClean="0"/>
+              <a:rPr lang="en-US"/>
               <a:t>Click to edit Master title style</a:t>
             </a:r>
-            <a:endParaRPr lang="en-US"/>
           </a:p>
         </p:txBody>
       </p:sp>
@@ -925,38 +984,37 @@
           <a:p>
             <a:pPr lvl="0"/>
             <a:r>
-              <a:rPr lang="en-US" smtClean="0"/>
+              <a:rPr lang="en-US"/>
               <a:t>Click to edit Master text styles</a:t>
             </a:r>
           </a:p>
           <a:p>
             <a:pPr lvl="1"/>
             <a:r>
-              <a:rPr lang="en-US" smtClean="0"/>
+              <a:rPr lang="en-US"/>
               <a:t>Second level</a:t>
             </a:r>
           </a:p>
           <a:p>
             <a:pPr lvl="2"/>
             <a:r>
-              <a:rPr lang="en-US" smtClean="0"/>
+              <a:rPr lang="en-US"/>
               <a:t>Third level</a:t>
             </a:r>
           </a:p>
           <a:p>
             <a:pPr lvl="3"/>
             <a:r>
-              <a:rPr lang="en-US" smtClean="0"/>
+              <a:rPr lang="en-US"/>
               <a:t>Fourth level</a:t>
             </a:r>
           </a:p>
           <a:p>
             <a:pPr lvl="4"/>
             <a:r>
-              <a:rPr lang="en-US" smtClean="0"/>
+              <a:rPr lang="en-US"/>
               <a:t>Fifth level</a:t>
             </a:r>
-            <a:endParaRPr lang="en-US"/>
           </a:p>
         </p:txBody>
       </p:sp>
@@ -977,7 +1035,7 @@
           <a:p>
             <a:fld id="{5BCAD085-E8A6-8845-BD4E-CB4CCA059FC4}" type="datetimeFigureOut">
               <a:rPr lang="en-US" smtClean="0"/>
-              <a:t>1/27/13</a:t>
+              <a:t>8/23/2026</a:t>
             </a:fld>
             <a:endParaRPr lang="en-US"/>
           </a:p>
@@ -1080,10 +1138,9 @@
           </a:lstStyle>
           <a:p>
             <a:r>
-              <a:rPr lang="en-US" smtClean="0"/>
+              <a:rPr lang="en-US"/>
               <a:t>Click to edit Master title style</a:t>
             </a:r>
-            <a:endParaRPr lang="en-US"/>
           </a:p>
         </p:txBody>
       </p:sp>
@@ -1200,7 +1257,7 @@
           <a:p>
             <a:pPr lvl="0"/>
             <a:r>
-              <a:rPr lang="en-US" smtClean="0"/>
+              <a:rPr lang="en-US"/>
               <a:t>Click to edit Master text styles</a:t>
             </a:r>
           </a:p>
@@ -1223,7 +1280,7 @@
           <a:p>
             <a:fld id="{5BCAD085-E8A6-8845-BD4E-CB4CCA059FC4}" type="datetimeFigureOut">
               <a:rPr lang="en-US" smtClean="0"/>
-              <a:t>1/27/13</a:t>
+              <a:t>8/23/2026</a:t>
             </a:fld>
             <a:endParaRPr lang="en-US"/>
           </a:p>
@@ -1317,10 +1374,9 @@
           <a:lstStyle/>
           <a:p>
             <a:r>
-              <a:rPr lang="en-US" smtClean="0"/>
+              <a:rPr lang="en-US"/>
               <a:t>Click to edit Master title style</a:t>
             </a:r>
-            <a:endParaRPr lang="en-US"/>
           </a:p>
         </p:txBody>
       </p:sp>
@@ -1374,38 +1430,37 @@
           <a:p>
             <a:pPr lvl="0"/>
             <a:r>
-              <a:rPr lang="en-US" smtClean="0"/>
+              <a:rPr lang="en-US"/>
               <a:t>Click to edit Master text styles</a:t>
             </a:r>
           </a:p>
           <a:p>
             <a:pPr lvl="1"/>
             <a:r>
-              <a:rPr lang="en-US" smtClean="0"/>
+              <a:rPr lang="en-US"/>
               <a:t>Second level</a:t>
             </a:r>
           </a:p>
           <a:p>
             <a:pPr lvl="2"/>
             <a:r>
-              <a:rPr lang="en-US" smtClean="0"/>
+              <a:rPr lang="en-US"/>
               <a:t>Third level</a:t>
             </a:r>
           </a:p>
           <a:p>
             <a:pPr lvl="3"/>
             <a:r>
-              <a:rPr lang="en-US" smtClean="0"/>
+              <a:rPr lang="en-US"/>
               <a:t>Fourth level</a:t>
             </a:r>
           </a:p>
           <a:p>
             <a:pPr lvl="4"/>
             <a:r>
-              <a:rPr lang="en-US" smtClean="0"/>
+              <a:rPr lang="en-US"/>
               <a:t>Fifth level</a:t>
             </a:r>
-            <a:endParaRPr lang="en-US"/>
           </a:p>
         </p:txBody>
       </p:sp>
@@ -1459,38 +1514,37 @@
           <a:p>
             <a:pPr lvl="0"/>
             <a:r>
-              <a:rPr lang="en-US" smtClean="0"/>
+              <a:rPr lang="en-US"/>
               <a:t>Click to edit Master text styles</a:t>
             </a:r>
           </a:p>
           <a:p>
             <a:pPr lvl="1"/>
             <a:r>
-              <a:rPr lang="en-US" smtClean="0"/>
+              <a:rPr lang="en-US"/>
               <a:t>Second level</a:t>
             </a:r>
           </a:p>
           <a:p>
             <a:pPr lvl="2"/>
             <a:r>
-              <a:rPr lang="en-US" smtClean="0"/>
+              <a:rPr lang="en-US"/>
               <a:t>Third level</a:t>
             </a:r>
           </a:p>
           <a:p>
             <a:pPr lvl="3"/>
             <a:r>
-              <a:rPr lang="en-US" smtClean="0"/>
+              <a:rPr lang="en-US"/>
               <a:t>Fourth level</a:t>
             </a:r>
           </a:p>
           <a:p>
             <a:pPr lvl="4"/>
             <a:r>
-              <a:rPr lang="en-US" smtClean="0"/>
+              <a:rPr lang="en-US"/>
               <a:t>Fifth level</a:t>
             </a:r>
-            <a:endParaRPr lang="en-US"/>
           </a:p>
         </p:txBody>
       </p:sp>
@@ -1511,7 +1565,7 @@
           <a:p>
             <a:fld id="{5BCAD085-E8A6-8845-BD4E-CB4CCA059FC4}" type="datetimeFigureOut">
               <a:rPr lang="en-US" smtClean="0"/>
-              <a:t>1/27/13</a:t>
+              <a:t>8/23/2026</a:t>
             </a:fld>
             <a:endParaRPr lang="en-US"/>
           </a:p>
@@ -1609,10 +1663,9 @@
           </a:lstStyle>
           <a:p>
             <a:r>
-              <a:rPr lang="en-US" smtClean="0"/>
+              <a:rPr lang="en-US"/>
               <a:t>Click to edit Master title style</a:t>
             </a:r>
-            <a:endParaRPr lang="en-US"/>
           </a:p>
         </p:txBody>
       </p:sp>
@@ -1675,7 +1728,7 @@
           <a:p>
             <a:pPr lvl="0"/>
             <a:r>
-              <a:rPr lang="en-US" smtClean="0"/>
+              <a:rPr lang="en-US"/>
               <a:t>Click to edit Master text styles</a:t>
             </a:r>
           </a:p>
@@ -1731,38 +1784,37 @@
           <a:p>
             <a:pPr lvl="0"/>
             <a:r>
-              <a:rPr lang="en-US" smtClean="0"/>
+              <a:rPr lang="en-US"/>
               <a:t>Click to edit Master text styles</a:t>
             </a:r>
           </a:p>
           <a:p>
             <a:pPr lvl="1"/>
             <a:r>
-              <a:rPr lang="en-US" smtClean="0"/>
+              <a:rPr lang="en-US"/>
               <a:t>Second level</a:t>
             </a:r>
           </a:p>
           <a:p>
             <a:pPr lvl="2"/>
             <a:r>
-              <a:rPr lang="en-US" smtClean="0"/>
+              <a:rPr lang="en-US"/>
               <a:t>Third level</a:t>
             </a:r>
           </a:p>
           <a:p>
             <a:pPr lvl="3"/>
             <a:r>
-              <a:rPr lang="en-US" smtClean="0"/>
+              <a:rPr lang="en-US"/>
               <a:t>Fourth level</a:t>
             </a:r>
           </a:p>
           <a:p>
             <a:pPr lvl="4"/>
             <a:r>
-              <a:rPr lang="en-US" smtClean="0"/>
+              <a:rPr lang="en-US"/>
               <a:t>Fifth level</a:t>
             </a:r>
-            <a:endParaRPr lang="en-US"/>
           </a:p>
         </p:txBody>
       </p:sp>
@@ -1825,7 +1877,7 @@
           <a:p>
             <a:pPr lvl="0"/>
             <a:r>
-              <a:rPr lang="en-US" smtClean="0"/>
+              <a:rPr lang="en-US"/>
               <a:t>Click to edit Master text styles</a:t>
             </a:r>
           </a:p>
@@ -1881,38 +1933,37 @@
           <a:p>
             <a:pPr lvl="0"/>
             <a:r>
-              <a:rPr lang="en-US" smtClean="0"/>
+              <a:rPr lang="en-US"/>
               <a:t>Click to edit Master text styles</a:t>
             </a:r>
           </a:p>
           <a:p>
             <a:pPr lvl="1"/>
             <a:r>
-              <a:rPr lang="en-US" smtClean="0"/>
+              <a:rPr lang="en-US"/>
               <a:t>Second level</a:t>
             </a:r>
           </a:p>
           <a:p>
             <a:pPr lvl="2"/>
             <a:r>
-              <a:rPr lang="en-US" smtClean="0"/>
+              <a:rPr lang="en-US"/>
               <a:t>Third level</a:t>
             </a:r>
           </a:p>
           <a:p>
             <a:pPr lvl="3"/>
             <a:r>
-              <a:rPr lang="en-US" smtClean="0"/>
+              <a:rPr lang="en-US"/>
               <a:t>Fourth level</a:t>
             </a:r>
           </a:p>
           <a:p>
             <a:pPr lvl="4"/>
             <a:r>
-              <a:rPr lang="en-US" smtClean="0"/>
+              <a:rPr lang="en-US"/>
               <a:t>Fifth level</a:t>
             </a:r>
-            <a:endParaRPr lang="en-US"/>
           </a:p>
         </p:txBody>
       </p:sp>
@@ -1933,7 +1984,7 @@
           <a:p>
             <a:fld id="{5BCAD085-E8A6-8845-BD4E-CB4CCA059FC4}" type="datetimeFigureOut">
               <a:rPr lang="en-US" smtClean="0"/>
-              <a:t>1/27/13</a:t>
+              <a:t>8/23/2026</a:t>
             </a:fld>
             <a:endParaRPr lang="en-US"/>
           </a:p>
@@ -2027,10 +2078,9 @@
           <a:lstStyle/>
           <a:p>
             <a:r>
-              <a:rPr lang="en-US" smtClean="0"/>
+              <a:rPr lang="en-US"/>
               <a:t>Click to edit Master title style</a:t>
             </a:r>
-            <a:endParaRPr lang="en-US"/>
           </a:p>
         </p:txBody>
       </p:sp>
@@ -2051,7 +2101,7 @@
           <a:p>
             <a:fld id="{5BCAD085-E8A6-8845-BD4E-CB4CCA059FC4}" type="datetimeFigureOut">
               <a:rPr lang="en-US" smtClean="0"/>
-              <a:t>1/27/13</a:t>
+              <a:t>8/23/2026</a:t>
             </a:fld>
             <a:endParaRPr lang="en-US"/>
           </a:p>
@@ -2146,7 +2196,7 @@
           <a:p>
             <a:fld id="{5BCAD085-E8A6-8845-BD4E-CB4CCA059FC4}" type="datetimeFigureOut">
               <a:rPr lang="en-US" smtClean="0"/>
-              <a:t>1/27/13</a:t>
+              <a:t>8/23/2026</a:t>
             </a:fld>
             <a:endParaRPr lang="en-US"/>
           </a:p>
@@ -2249,10 +2299,9 @@
           </a:lstStyle>
           <a:p>
             <a:r>
-              <a:rPr lang="en-US" smtClean="0"/>
+              <a:rPr lang="en-US"/>
               <a:t>Click to edit Master title style</a:t>
             </a:r>
-            <a:endParaRPr lang="en-US"/>
           </a:p>
         </p:txBody>
       </p:sp>
@@ -2306,38 +2355,37 @@
           <a:p>
             <a:pPr lvl="0"/>
             <a:r>
-              <a:rPr lang="en-US" smtClean="0"/>
+              <a:rPr lang="en-US"/>
               <a:t>Click to edit Master text styles</a:t>
             </a:r>
           </a:p>
           <a:p>
             <a:pPr lvl="1"/>
             <a:r>
-              <a:rPr lang="en-US" smtClean="0"/>
+              <a:rPr lang="en-US"/>
               <a:t>Second level</a:t>
             </a:r>
           </a:p>
           <a:p>
             <a:pPr lvl="2"/>
             <a:r>
-              <a:rPr lang="en-US" smtClean="0"/>
+              <a:rPr lang="en-US"/>
               <a:t>Third level</a:t>
             </a:r>
           </a:p>
           <a:p>
             <a:pPr lvl="3"/>
             <a:r>
-              <a:rPr lang="en-US" smtClean="0"/>
+              <a:rPr lang="en-US"/>
               <a:t>Fourth level</a:t>
             </a:r>
           </a:p>
           <a:p>
             <a:pPr lvl="4"/>
             <a:r>
-              <a:rPr lang="en-US" smtClean="0"/>
+              <a:rPr lang="en-US"/>
               <a:t>Fifth level</a:t>
             </a:r>
-            <a:endParaRPr lang="en-US"/>
           </a:p>
         </p:txBody>
       </p:sp>
@@ -2400,7 +2448,7 @@
           <a:p>
             <a:pPr lvl="0"/>
             <a:r>
-              <a:rPr lang="en-US" smtClean="0"/>
+              <a:rPr lang="en-US"/>
               <a:t>Click to edit Master text styles</a:t>
             </a:r>
           </a:p>
@@ -2423,7 +2471,7 @@
           <a:p>
             <a:fld id="{5BCAD085-E8A6-8845-BD4E-CB4CCA059FC4}" type="datetimeFigureOut">
               <a:rPr lang="en-US" smtClean="0"/>
-              <a:t>1/27/13</a:t>
+              <a:t>8/23/2026</a:t>
             </a:fld>
             <a:endParaRPr lang="en-US"/>
           </a:p>
@@ -2526,10 +2574,9 @@
           </a:lstStyle>
           <a:p>
             <a:r>
-              <a:rPr lang="en-US" smtClean="0"/>
+              <a:rPr lang="en-US"/>
               <a:t>Click to edit Master title style</a:t>
             </a:r>
-            <a:endParaRPr lang="en-US"/>
           </a:p>
         </p:txBody>
       </p:sp>
@@ -2653,7 +2700,7 @@
           <a:p>
             <a:pPr lvl="0"/>
             <a:r>
-              <a:rPr lang="en-US" smtClean="0"/>
+              <a:rPr lang="en-US"/>
               <a:t>Click to edit Master text styles</a:t>
             </a:r>
           </a:p>
@@ -2676,7 +2723,7 @@
           <a:p>
             <a:fld id="{5BCAD085-E8A6-8845-BD4E-CB4CCA059FC4}" type="datetimeFigureOut">
               <a:rPr lang="en-US" smtClean="0"/>
-              <a:t>1/27/13</a:t>
+              <a:t>8/23/2026</a:t>
             </a:fld>
             <a:endParaRPr lang="en-US"/>
           </a:p>
@@ -2785,10 +2832,9 @@
           <a:lstStyle/>
           <a:p>
             <a:r>
-              <a:rPr lang="en-US" smtClean="0"/>
+              <a:rPr lang="en-US"/>
               <a:t>Click to edit Master title style</a:t>
             </a:r>
-            <a:endParaRPr lang="en-US"/>
           </a:p>
         </p:txBody>
       </p:sp>
@@ -2819,38 +2865,37 @@
           <a:p>
             <a:pPr lvl="0"/>
             <a:r>
-              <a:rPr lang="en-US" smtClean="0"/>
+              <a:rPr lang="en-US"/>
               <a:t>Click to edit Master text styles</a:t>
             </a:r>
           </a:p>
           <a:p>
             <a:pPr lvl="1"/>
             <a:r>
-              <a:rPr lang="en-US" smtClean="0"/>
+              <a:rPr lang="en-US"/>
               <a:t>Second level</a:t>
             </a:r>
           </a:p>
           <a:p>
             <a:pPr lvl="2"/>
             <a:r>
-              <a:rPr lang="en-US" smtClean="0"/>
+              <a:rPr lang="en-US"/>
               <a:t>Third level</a:t>
             </a:r>
           </a:p>
           <a:p>
             <a:pPr lvl="3"/>
             <a:r>
-              <a:rPr lang="en-US" smtClean="0"/>
+              <a:rPr lang="en-US"/>
               <a:t>Fourth level</a:t>
             </a:r>
           </a:p>
           <a:p>
             <a:pPr lvl="4"/>
             <a:r>
-              <a:rPr lang="en-US" smtClean="0"/>
+              <a:rPr lang="en-US"/>
               <a:t>Fifth level</a:t>
             </a:r>
-            <a:endParaRPr lang="en-US"/>
           </a:p>
         </p:txBody>
       </p:sp>
@@ -2889,7 +2934,7 @@
           <a:p>
             <a:fld id="{5BCAD085-E8A6-8845-BD4E-CB4CCA059FC4}" type="datetimeFigureOut">
               <a:rPr lang="en-US" smtClean="0"/>
-              <a:t>1/27/13</a:t>
+              <a:t>8/23/2026</a:t>
             </a:fld>
             <a:endParaRPr lang="en-US"/>
           </a:p>
@@ -3248,7 +3293,7 @@
 </file>
 
 <file path=ppt/slides/slide1.xml><?xml version="1.0" encoding="utf-8"?>
-<p:sld xmlns:a="http://schemas.openxmlformats.org/drawingml/2006/main" xmlns:p="http://schemas.openxmlformats.org/presentationml/2006/main" xmlns:r="http://schemas.openxmlformats.org/officeDocument/2006/relationships">
+<p:sld xmlns:a="http://schemas.openxmlformats.org/drawingml/2006/main" xmlns:r="http://schemas.openxmlformats.org/officeDocument/2006/relationships" xmlns:p="http://schemas.openxmlformats.org/presentationml/2006/main">
   <p:cSld>
     <p:spTree>
       <p:nvGrpSpPr>
@@ -3256,7 +3301,14 @@
         <p:cNvGrpSpPr/>
         <p:nvPr/>
       </p:nvGrpSpPr>
-      <p:grpSpPr/>
+      <p:grpSpPr>
+        <a:xfrm>
+          <a:off x="0" y="0"/>
+          <a:ext cx="0" cy="0"/>
+          <a:chOff x="0" y="0"/>
+          <a:chExt cx="0" cy="0"/>
+        </a:xfrm>
+      </p:grpSpPr>
       <p:sp>
         <p:nvSpPr>
           <p:cNvPr id="2" name="TextBox 1"/>
@@ -3274,7 +3326,7 @@
           <a:noFill/>
         </p:spPr>
         <p:txBody>
-          <a:bodyPr wrap="square" lIns="0" rIns="0" tIns="0" bIns="0" anchor="t">
+          <a:bodyPr wrap="square" lIns="0" tIns="0" rIns="0" bIns="0" anchor="t">
             <a:spAutoFit/>
           </a:bodyPr>
           <a:lstStyle/>
@@ -3318,7 +3370,7 @@
           <a:noFill/>
         </p:spPr>
         <p:txBody>
-          <a:bodyPr wrap="square" lIns="0" rIns="0" tIns="0" bIns="0" anchor="t">
+          <a:bodyPr wrap="square" lIns="0" tIns="0" rIns="0" bIns="0" anchor="t">
             <a:spAutoFit/>
           </a:bodyPr>
           <a:lstStyle/>
@@ -3382,10 +3434,11 @@
           </a:fontRef>
         </p:style>
         <p:txBody>
-          <a:bodyPr rtlCol="0" anchor="ctr" wrap="square" lIns="128016" rIns="128016" tIns="73152" bIns="73152"/>
+          <a:bodyPr wrap="square" lIns="128016" tIns="73152" rIns="128016" bIns="73152" rtlCol="0" anchor="ctr"/>
           <a:lstStyle/>
           <a:p>
             <a:pPr algn="ctr"/>
+            <a:endParaRPr/>
           </a:p>
         </p:txBody>
       </p:sp>
@@ -3426,10 +3479,11 @@
           </a:fontRef>
         </p:style>
         <p:txBody>
-          <a:bodyPr rtlCol="0" anchor="ctr" wrap="square" lIns="128016" rIns="128016" tIns="73152" bIns="73152"/>
+          <a:bodyPr wrap="square" lIns="128016" tIns="73152" rIns="128016" bIns="73152" rtlCol="0" anchor="ctr"/>
           <a:lstStyle/>
           <a:p>
             <a:pPr algn="ctr"/>
+            <a:endParaRPr/>
           </a:p>
         </p:txBody>
       </p:sp>
@@ -3450,7 +3504,7 @@
           <a:noFill/>
         </p:spPr>
         <p:txBody>
-          <a:bodyPr wrap="square" lIns="0" rIns="0" tIns="0" bIns="0" anchor="t">
+          <a:bodyPr wrap="square" lIns="0" tIns="0" rIns="0" bIns="0" anchor="t">
             <a:spAutoFit/>
           </a:bodyPr>
           <a:lstStyle/>
@@ -3491,7 +3545,7 @@
           <a:noFill/>
         </p:spPr>
         <p:txBody>
-          <a:bodyPr wrap="square" lIns="0" rIns="0" tIns="0" bIns="0" anchor="t">
+          <a:bodyPr wrap="square" lIns="0" tIns="0" rIns="0" bIns="0" anchor="t">
             <a:spAutoFit/>
           </a:bodyPr>
           <a:lstStyle/>
@@ -3556,7 +3610,7 @@
           <a:noFill/>
         </p:spPr>
         <p:txBody>
-          <a:bodyPr wrap="square" lIns="0" rIns="0" tIns="0" bIns="0" anchor="t">
+          <a:bodyPr wrap="square" lIns="0" tIns="0" rIns="0" bIns="0" anchor="t">
             <a:spAutoFit/>
           </a:bodyPr>
           <a:lstStyle/>
@@ -3617,10 +3671,11 @@
           </a:fontRef>
         </p:style>
         <p:txBody>
-          <a:bodyPr rtlCol="0" anchor="ctr" wrap="square" lIns="128016" rIns="128016" tIns="73152" bIns="73152"/>
+          <a:bodyPr wrap="square" lIns="128016" tIns="73152" rIns="128016" bIns="73152" rtlCol="0" anchor="ctr"/>
           <a:lstStyle/>
           <a:p>
             <a:pPr algn="ctr"/>
+            <a:endParaRPr/>
           </a:p>
         </p:txBody>
       </p:sp>
@@ -3661,10 +3716,11 @@
           </a:fontRef>
         </p:style>
         <p:txBody>
-          <a:bodyPr rtlCol="0" anchor="ctr" wrap="square" lIns="128016" rIns="128016" tIns="73152" bIns="73152"/>
+          <a:bodyPr wrap="square" lIns="128016" tIns="73152" rIns="128016" bIns="73152" rtlCol="0" anchor="ctr"/>
           <a:lstStyle/>
           <a:p>
             <a:pPr algn="ctr"/>
+            <a:endParaRPr/>
           </a:p>
         </p:txBody>
       </p:sp>
@@ -3685,7 +3741,7 @@
           <a:noFill/>
         </p:spPr>
         <p:txBody>
-          <a:bodyPr wrap="square" lIns="0" rIns="0" tIns="0" bIns="0" anchor="t">
+          <a:bodyPr wrap="square" lIns="0" tIns="0" rIns="0" bIns="0" anchor="t">
             <a:spAutoFit/>
           </a:bodyPr>
           <a:lstStyle/>
@@ -3726,7 +3782,7 @@
           <a:noFill/>
         </p:spPr>
         <p:txBody>
-          <a:bodyPr wrap="square" lIns="0" rIns="0" tIns="0" bIns="0" anchor="t">
+          <a:bodyPr wrap="square" lIns="0" tIns="0" rIns="0" bIns="0" anchor="t">
             <a:spAutoFit/>
           </a:bodyPr>
           <a:lstStyle/>
@@ -3791,7 +3847,7 @@
           <a:noFill/>
         </p:spPr>
         <p:txBody>
-          <a:bodyPr wrap="square" lIns="0" rIns="0" tIns="0" bIns="0" anchor="t">
+          <a:bodyPr wrap="square" lIns="0" tIns="0" rIns="0" bIns="0" anchor="t">
             <a:spAutoFit/>
           </a:bodyPr>
           <a:lstStyle/>
@@ -3852,10 +3908,11 @@
           </a:fontRef>
         </p:style>
         <p:txBody>
-          <a:bodyPr rtlCol="0" anchor="ctr" wrap="square" lIns="128016" rIns="128016" tIns="73152" bIns="73152"/>
+          <a:bodyPr wrap="square" lIns="128016" tIns="73152" rIns="128016" bIns="73152" rtlCol="0" anchor="ctr"/>
           <a:lstStyle/>
           <a:p>
             <a:pPr algn="ctr"/>
+            <a:endParaRPr/>
           </a:p>
         </p:txBody>
       </p:sp>
@@ -3896,10 +3953,11 @@
           </a:fontRef>
         </p:style>
         <p:txBody>
-          <a:bodyPr rtlCol="0" anchor="ctr" wrap="square" lIns="128016" rIns="128016" tIns="73152" bIns="73152"/>
+          <a:bodyPr wrap="square" lIns="128016" tIns="73152" rIns="128016" bIns="73152" rtlCol="0" anchor="ctr"/>
           <a:lstStyle/>
           <a:p>
             <a:pPr algn="ctr"/>
+            <a:endParaRPr/>
           </a:p>
         </p:txBody>
       </p:sp>
@@ -3920,7 +3978,7 @@
           <a:noFill/>
         </p:spPr>
         <p:txBody>
-          <a:bodyPr wrap="square" lIns="0" rIns="0" tIns="0" bIns="0" anchor="t">
+          <a:bodyPr wrap="square" lIns="0" tIns="0" rIns="0" bIns="0" anchor="t">
             <a:spAutoFit/>
           </a:bodyPr>
           <a:lstStyle/>
@@ -3961,7 +4019,7 @@
           <a:noFill/>
         </p:spPr>
         <p:txBody>
-          <a:bodyPr wrap="square" lIns="0" rIns="0" tIns="0" bIns="0" anchor="t">
+          <a:bodyPr wrap="square" lIns="0" tIns="0" rIns="0" bIns="0" anchor="t">
             <a:spAutoFit/>
           </a:bodyPr>
           <a:lstStyle/>
@@ -4026,7 +4084,7 @@
           <a:noFill/>
         </p:spPr>
         <p:txBody>
-          <a:bodyPr wrap="square" lIns="0" rIns="0" tIns="0" bIns="0" anchor="t">
+          <a:bodyPr wrap="square" lIns="0" tIns="0" rIns="0" bIns="0" anchor="t">
             <a:spAutoFit/>
           </a:bodyPr>
           <a:lstStyle/>
@@ -4067,7 +4125,7 @@
           <a:noFill/>
         </p:spPr>
         <p:txBody>
-          <a:bodyPr wrap="square" lIns="0" rIns="0" tIns="0" bIns="0" anchor="t">
+          <a:bodyPr wrap="square" lIns="0" tIns="0" rIns="0" bIns="0" anchor="t">
             <a:spAutoFit/>
           </a:bodyPr>
           <a:lstStyle/>
@@ -4149,7 +4207,7 @@
           </a:fontRef>
         </p:style>
         <p:txBody>
-          <a:bodyPr rtlCol="0" anchor="ctr" wrap="square" lIns="128016" rIns="128016" tIns="73152" bIns="73152"/>
+          <a:bodyPr wrap="square" lIns="128016" tIns="73152" rIns="128016" bIns="73152" rtlCol="0" anchor="ctr"/>
           <a:lstStyle/>
           <a:p>
             <a:pPr algn="ctr">
@@ -4188,7 +4246,7 @@
           <a:noFill/>
         </p:spPr>
         <p:txBody>
-          <a:bodyPr wrap="square" lIns="0" rIns="0" tIns="0" bIns="0" anchor="t">
+          <a:bodyPr wrap="square" lIns="0" tIns="0" rIns="0" bIns="0" anchor="t">
             <a:spAutoFit/>
           </a:bodyPr>
           <a:lstStyle/>
@@ -4232,7 +4290,7 @@
           <a:noFill/>
         </p:spPr>
         <p:txBody>
-          <a:bodyPr wrap="square" lIns="0" rIns="0" tIns="0" bIns="0" anchor="t">
+          <a:bodyPr wrap="square" lIns="0" tIns="0" rIns="0" bIns="0" anchor="t">
             <a:spAutoFit/>
           </a:bodyPr>
           <a:lstStyle/>
@@ -4265,7 +4323,7 @@
 </file>
 
 <file path=ppt/slides/slide2.xml><?xml version="1.0" encoding="utf-8"?>
-<p:sld xmlns:a="http://schemas.openxmlformats.org/drawingml/2006/main" xmlns:p="http://schemas.openxmlformats.org/presentationml/2006/main" xmlns:r="http://schemas.openxmlformats.org/officeDocument/2006/relationships">
+<p:sld xmlns:a="http://schemas.openxmlformats.org/drawingml/2006/main" xmlns:r="http://schemas.openxmlformats.org/officeDocument/2006/relationships" xmlns:p="http://schemas.openxmlformats.org/presentationml/2006/main">
   <p:cSld>
     <p:spTree>
       <p:nvGrpSpPr>
@@ -4273,7 +4331,14 @@
         <p:cNvGrpSpPr/>
         <p:nvPr/>
       </p:nvGrpSpPr>
-      <p:grpSpPr/>
+      <p:grpSpPr>
+        <a:xfrm>
+          <a:off x="0" y="0"/>
+          <a:ext cx="0" cy="0"/>
+          <a:chOff x="0" y="0"/>
+          <a:chExt cx="0" cy="0"/>
+        </a:xfrm>
+      </p:grpSpPr>
       <p:sp>
         <p:nvSpPr>
           <p:cNvPr id="2" name="TextBox 1"/>
@@ -4291,7 +4356,7 @@
           <a:noFill/>
         </p:spPr>
         <p:txBody>
-          <a:bodyPr wrap="square" lIns="0" rIns="0" tIns="0" bIns="0" anchor="t">
+          <a:bodyPr wrap="square" lIns="0" tIns="0" rIns="0" bIns="0" anchor="t">
             <a:spAutoFit/>
           </a:bodyPr>
           <a:lstStyle/>
@@ -4335,7 +4400,7 @@
           <a:noFill/>
         </p:spPr>
         <p:txBody>
-          <a:bodyPr wrap="square" lIns="0" rIns="0" tIns="0" bIns="0" anchor="t">
+          <a:bodyPr wrap="square" lIns="0" tIns="0" rIns="0" bIns="0" anchor="t">
             <a:spAutoFit/>
           </a:bodyPr>
           <a:lstStyle/>
@@ -4399,10 +4464,11 @@
           </a:fontRef>
         </p:style>
         <p:txBody>
-          <a:bodyPr rtlCol="0" anchor="ctr" wrap="square" lIns="128016" rIns="128016" tIns="73152" bIns="73152"/>
+          <a:bodyPr wrap="square" lIns="128016" tIns="73152" rIns="128016" bIns="73152" rtlCol="0" anchor="ctr"/>
           <a:lstStyle/>
           <a:p>
             <a:pPr algn="ctr"/>
+            <a:endParaRPr/>
           </a:p>
         </p:txBody>
       </p:sp>
@@ -4443,7 +4509,7 @@
           </a:fontRef>
         </p:style>
         <p:txBody>
-          <a:bodyPr rtlCol="0" anchor="ctr" wrap="square" lIns="128016" rIns="128016" tIns="73152" bIns="73152"/>
+          <a:bodyPr wrap="square" lIns="128016" tIns="73152" rIns="128016" bIns="73152" rtlCol="0" anchor="ctr"/>
           <a:lstStyle/>
           <a:p>
             <a:pPr algn="ctr">
@@ -4482,7 +4548,7 @@
           <a:noFill/>
         </p:spPr>
         <p:txBody>
-          <a:bodyPr wrap="square" lIns="0" rIns="0" tIns="0" bIns="0" anchor="t">
+          <a:bodyPr wrap="square" lIns="0" tIns="0" rIns="0" bIns="0" anchor="t">
             <a:spAutoFit/>
           </a:bodyPr>
           <a:lstStyle/>
@@ -4523,7 +4589,7 @@
           <a:noFill/>
         </p:spPr>
         <p:txBody>
-          <a:bodyPr wrap="square" lIns="0" rIns="0" tIns="0" bIns="0" anchor="t">
+          <a:bodyPr wrap="square" lIns="0" tIns="0" rIns="0" bIns="0" anchor="t">
             <a:spAutoFit/>
           </a:bodyPr>
           <a:lstStyle/>
@@ -4609,7 +4675,7 @@
           <a:noFill/>
         </p:spPr>
         <p:txBody>
-          <a:bodyPr wrap="square" lIns="0" rIns="0" tIns="0" bIns="0" anchor="t">
+          <a:bodyPr wrap="square" lIns="0" tIns="0" rIns="0" bIns="0" anchor="t">
             <a:spAutoFit/>
           </a:bodyPr>
           <a:lstStyle/>
@@ -4670,10 +4736,11 @@
           </a:fontRef>
         </p:style>
         <p:txBody>
-          <a:bodyPr rtlCol="0" anchor="ctr" wrap="square" lIns="128016" rIns="128016" tIns="73152" bIns="73152"/>
+          <a:bodyPr wrap="square" lIns="128016" tIns="73152" rIns="128016" bIns="73152" rtlCol="0" anchor="ctr"/>
           <a:lstStyle/>
           <a:p>
             <a:pPr algn="ctr"/>
+            <a:endParaRPr/>
           </a:p>
         </p:txBody>
       </p:sp>
@@ -4714,7 +4781,7 @@
           </a:fontRef>
         </p:style>
         <p:txBody>
-          <a:bodyPr rtlCol="0" anchor="ctr" wrap="square" lIns="128016" rIns="128016" tIns="73152" bIns="73152"/>
+          <a:bodyPr wrap="square" lIns="128016" tIns="73152" rIns="128016" bIns="73152" rtlCol="0" anchor="ctr"/>
           <a:lstStyle/>
           <a:p>
             <a:pPr algn="ctr">
@@ -4753,7 +4820,7 @@
           <a:noFill/>
         </p:spPr>
         <p:txBody>
-          <a:bodyPr wrap="square" lIns="0" rIns="0" tIns="0" bIns="0" anchor="t">
+          <a:bodyPr wrap="square" lIns="0" tIns="0" rIns="0" bIns="0" anchor="t">
             <a:spAutoFit/>
           </a:bodyPr>
           <a:lstStyle/>
@@ -4794,7 +4861,7 @@
           <a:noFill/>
         </p:spPr>
         <p:txBody>
-          <a:bodyPr wrap="square" lIns="0" rIns="0" tIns="0" bIns="0" anchor="t">
+          <a:bodyPr wrap="square" lIns="0" tIns="0" rIns="0" bIns="0" anchor="t">
             <a:spAutoFit/>
           </a:bodyPr>
           <a:lstStyle/>
@@ -4880,7 +4947,7 @@
           <a:noFill/>
         </p:spPr>
         <p:txBody>
-          <a:bodyPr wrap="square" lIns="0" rIns="0" tIns="0" bIns="0" anchor="t">
+          <a:bodyPr wrap="square" lIns="0" tIns="0" rIns="0" bIns="0" anchor="t">
             <a:spAutoFit/>
           </a:bodyPr>
           <a:lstStyle/>
@@ -4941,10 +5008,11 @@
           </a:fontRef>
         </p:style>
         <p:txBody>
-          <a:bodyPr rtlCol="0" anchor="ctr" wrap="square" lIns="128016" rIns="128016" tIns="73152" bIns="73152"/>
+          <a:bodyPr wrap="square" lIns="128016" tIns="73152" rIns="128016" bIns="73152" rtlCol="0" anchor="ctr"/>
           <a:lstStyle/>
           <a:p>
             <a:pPr algn="ctr"/>
+            <a:endParaRPr/>
           </a:p>
         </p:txBody>
       </p:sp>
@@ -4985,7 +5053,7 @@
           </a:fontRef>
         </p:style>
         <p:txBody>
-          <a:bodyPr rtlCol="0" anchor="ctr" wrap="square" lIns="128016" rIns="128016" tIns="73152" bIns="73152"/>
+          <a:bodyPr wrap="square" lIns="128016" tIns="73152" rIns="128016" bIns="73152" rtlCol="0" anchor="ctr"/>
           <a:lstStyle/>
           <a:p>
             <a:pPr algn="ctr">
@@ -5024,7 +5092,7 @@
           <a:noFill/>
         </p:spPr>
         <p:txBody>
-          <a:bodyPr wrap="square" lIns="0" rIns="0" tIns="0" bIns="0" anchor="t">
+          <a:bodyPr wrap="square" lIns="0" tIns="0" rIns="0" bIns="0" anchor="t">
             <a:spAutoFit/>
           </a:bodyPr>
           <a:lstStyle/>
@@ -5065,7 +5133,7 @@
           <a:noFill/>
         </p:spPr>
         <p:txBody>
-          <a:bodyPr wrap="square" lIns="0" rIns="0" tIns="0" bIns="0" anchor="t">
+          <a:bodyPr wrap="square" lIns="0" tIns="0" rIns="0" bIns="0" anchor="t">
             <a:spAutoFit/>
           </a:bodyPr>
           <a:lstStyle/>
@@ -5151,7 +5219,7 @@
           <a:noFill/>
         </p:spPr>
         <p:txBody>
-          <a:bodyPr wrap="square" lIns="0" rIns="0" tIns="0" bIns="0" anchor="t">
+          <a:bodyPr wrap="square" lIns="0" tIns="0" rIns="0" bIns="0" anchor="t">
             <a:spAutoFit/>
           </a:bodyPr>
           <a:lstStyle/>
@@ -5192,7 +5260,7 @@
           <a:noFill/>
         </p:spPr>
         <p:txBody>
-          <a:bodyPr wrap="square" lIns="0" rIns="0" tIns="0" bIns="0" anchor="t">
+          <a:bodyPr wrap="square" lIns="0" tIns="0" rIns="0" bIns="0" anchor="t">
             <a:spAutoFit/>
           </a:bodyPr>
           <a:lstStyle/>
@@ -5288,10 +5356,11 @@
           </a:fontRef>
         </p:style>
         <p:txBody>
-          <a:bodyPr rtlCol="0" anchor="ctr" wrap="square" lIns="128016" rIns="128016" tIns="73152" bIns="73152"/>
+          <a:bodyPr wrap="square" lIns="128016" tIns="73152" rIns="128016" bIns="73152" rtlCol="0" anchor="ctr"/>
           <a:lstStyle/>
           <a:p>
             <a:pPr algn="ctr"/>
+            <a:endParaRPr/>
           </a:p>
         </p:txBody>
       </p:sp>
@@ -5312,7 +5381,7 @@
           <a:noFill/>
         </p:spPr>
         <p:txBody>
-          <a:bodyPr wrap="square" lIns="0" rIns="0" tIns="0" bIns="0" anchor="b">
+          <a:bodyPr wrap="square" lIns="0" tIns="0" rIns="0" bIns="0" anchor="b">
             <a:spAutoFit/>
           </a:bodyPr>
           <a:lstStyle/>
@@ -5353,7 +5422,7 @@
           <a:noFill/>
         </p:spPr>
         <p:txBody>
-          <a:bodyPr wrap="square" lIns="0" rIns="0" tIns="0" bIns="0" anchor="t">
+          <a:bodyPr wrap="square" lIns="0" tIns="0" rIns="0" bIns="0" anchor="t">
             <a:spAutoFit/>
           </a:bodyPr>
           <a:lstStyle/>
@@ -5414,10 +5483,11 @@
           </a:fontRef>
         </p:style>
         <p:txBody>
-          <a:bodyPr rtlCol="0" anchor="ctr" wrap="square" lIns="128016" rIns="128016" tIns="73152" bIns="73152"/>
+          <a:bodyPr wrap="square" lIns="128016" tIns="73152" rIns="128016" bIns="73152" rtlCol="0" anchor="ctr"/>
           <a:lstStyle/>
           <a:p>
             <a:pPr algn="ctr"/>
+            <a:endParaRPr/>
           </a:p>
         </p:txBody>
       </p:sp>
@@ -5438,7 +5508,7 @@
           <a:noFill/>
         </p:spPr>
         <p:txBody>
-          <a:bodyPr wrap="square" lIns="0" rIns="0" tIns="0" bIns="0" anchor="b">
+          <a:bodyPr wrap="square" lIns="0" tIns="0" rIns="0" bIns="0" anchor="b">
             <a:spAutoFit/>
           </a:bodyPr>
           <a:lstStyle/>
@@ -5479,7 +5549,7 @@
           <a:noFill/>
         </p:spPr>
         <p:txBody>
-          <a:bodyPr wrap="square" lIns="0" rIns="0" tIns="0" bIns="0" anchor="t">
+          <a:bodyPr wrap="square" lIns="0" tIns="0" rIns="0" bIns="0" anchor="t">
             <a:spAutoFit/>
           </a:bodyPr>
           <a:lstStyle/>
@@ -5576,7 +5646,7 @@
           </a:fontRef>
         </p:style>
         <p:txBody>
-          <a:bodyPr rtlCol="0" anchor="ctr" wrap="square" lIns="128016" rIns="128016" tIns="73152" bIns="73152"/>
+          <a:bodyPr wrap="square" lIns="128016" tIns="73152" rIns="128016" bIns="73152" rtlCol="0" anchor="ctr"/>
           <a:lstStyle/>
           <a:p>
             <a:pPr algn="ctr">
@@ -5615,7 +5685,7 @@
           <a:noFill/>
         </p:spPr>
         <p:txBody>
-          <a:bodyPr wrap="square" lIns="0" rIns="0" tIns="0" bIns="0" anchor="t">
+          <a:bodyPr wrap="square" lIns="0" tIns="0" rIns="0" bIns="0" anchor="t">
             <a:spAutoFit/>
           </a:bodyPr>
           <a:lstStyle/>
@@ -5659,7 +5729,7 @@
           <a:noFill/>
         </p:spPr>
         <p:txBody>
-          <a:bodyPr wrap="square" lIns="0" rIns="0" tIns="0" bIns="0" anchor="t">
+          <a:bodyPr wrap="square" lIns="0" tIns="0" rIns="0" bIns="0" anchor="t">
             <a:spAutoFit/>
           </a:bodyPr>
           <a:lstStyle/>
@@ -5692,7 +5762,7 @@
 </file>
 
 <file path=ppt/slides/slide3.xml><?xml version="1.0" encoding="utf-8"?>
-<p:sld xmlns:a="http://schemas.openxmlformats.org/drawingml/2006/main" xmlns:p="http://schemas.openxmlformats.org/presentationml/2006/main" xmlns:r="http://schemas.openxmlformats.org/officeDocument/2006/relationships">
+<p:sld xmlns:a="http://schemas.openxmlformats.org/drawingml/2006/main" xmlns:r="http://schemas.openxmlformats.org/officeDocument/2006/relationships" xmlns:p="http://schemas.openxmlformats.org/presentationml/2006/main">
   <p:cSld>
     <p:spTree>
       <p:nvGrpSpPr>
@@ -5700,7 +5770,14 @@
         <p:cNvGrpSpPr/>
         <p:nvPr/>
       </p:nvGrpSpPr>
-      <p:grpSpPr/>
+      <p:grpSpPr>
+        <a:xfrm>
+          <a:off x="0" y="0"/>
+          <a:ext cx="0" cy="0"/>
+          <a:chOff x="0" y="0"/>
+          <a:chExt cx="0" cy="0"/>
+        </a:xfrm>
+      </p:grpSpPr>
       <p:sp>
         <p:nvSpPr>
           <p:cNvPr id="2" name="TextBox 1"/>
@@ -5718,7 +5795,7 @@
           <a:noFill/>
         </p:spPr>
         <p:txBody>
-          <a:bodyPr wrap="square" lIns="0" rIns="0" tIns="0" bIns="0" anchor="t">
+          <a:bodyPr wrap="square" lIns="0" tIns="0" rIns="0" bIns="0" anchor="t">
             <a:spAutoFit/>
           </a:bodyPr>
           <a:lstStyle/>
@@ -5762,7 +5839,7 @@
           <a:noFill/>
         </p:spPr>
         <p:txBody>
-          <a:bodyPr wrap="square" lIns="0" rIns="0" tIns="0" bIns="0" anchor="t">
+          <a:bodyPr wrap="square" lIns="0" tIns="0" rIns="0" bIns="0" anchor="t">
             <a:spAutoFit/>
           </a:bodyPr>
           <a:lstStyle/>
@@ -5803,7 +5880,7 @@
           <a:noFill/>
         </p:spPr>
         <p:txBody>
-          <a:bodyPr wrap="square" lIns="0" rIns="0" tIns="0" bIns="0" anchor="t">
+          <a:bodyPr wrap="square" lIns="0" tIns="0" rIns="0" bIns="0" anchor="t">
             <a:spAutoFit/>
           </a:bodyPr>
           <a:lstStyle/>
@@ -5867,7 +5944,7 @@
           </a:fontRef>
         </p:style>
         <p:txBody>
-          <a:bodyPr rtlCol="0" anchor="ctr" wrap="square" lIns="128016" rIns="128016" tIns="73152" bIns="73152"/>
+          <a:bodyPr wrap="square" lIns="128016" tIns="73152" rIns="128016" bIns="73152" rtlCol="0" anchor="ctr"/>
           <a:lstStyle/>
           <a:p>
             <a:pPr algn="ctr">
@@ -5950,7 +6027,7 @@
           </a:fontRef>
         </p:style>
         <p:txBody>
-          <a:bodyPr rtlCol="0" anchor="ctr" wrap="square" lIns="128016" rIns="128016" tIns="73152" bIns="73152"/>
+          <a:bodyPr wrap="square" lIns="128016" tIns="73152" rIns="128016" bIns="73152" rtlCol="0" anchor="ctr"/>
           <a:lstStyle/>
           <a:p>
             <a:pPr algn="ctr">
@@ -6080,7 +6157,7 @@
           </a:fontRef>
         </p:style>
         <p:txBody>
-          <a:bodyPr rtlCol="0" anchor="ctr" wrap="square" lIns="128016" rIns="128016" tIns="73152" bIns="73152"/>
+          <a:bodyPr wrap="square" lIns="128016" tIns="73152" rIns="128016" bIns="73152" rtlCol="0" anchor="ctr"/>
           <a:lstStyle/>
           <a:p>
             <a:pPr algn="ctr">
@@ -6119,7 +6196,7 @@
           <a:noFill/>
         </p:spPr>
         <p:txBody>
-          <a:bodyPr wrap="square" lIns="0" rIns="0" tIns="0" bIns="0" anchor="t">
+          <a:bodyPr wrap="square" lIns="0" tIns="0" rIns="0" bIns="0" anchor="t">
             <a:spAutoFit/>
           </a:bodyPr>
           <a:lstStyle/>
@@ -6163,7 +6240,7 @@
           <a:noFill/>
         </p:spPr>
         <p:txBody>
-          <a:bodyPr wrap="square" lIns="0" rIns="0" tIns="0" bIns="0" anchor="t">
+          <a:bodyPr wrap="square" lIns="0" tIns="0" rIns="0" bIns="0" anchor="t">
             <a:spAutoFit/>
           </a:bodyPr>
           <a:lstStyle/>
@@ -6196,7 +6273,7 @@
 </file>
 
 <file path=ppt/slides/slide4.xml><?xml version="1.0" encoding="utf-8"?>
-<p:sld xmlns:a="http://schemas.openxmlformats.org/drawingml/2006/main" xmlns:p="http://schemas.openxmlformats.org/presentationml/2006/main" xmlns:r="http://schemas.openxmlformats.org/officeDocument/2006/relationships">
+<p:sld xmlns:a="http://schemas.openxmlformats.org/drawingml/2006/main" xmlns:r="http://schemas.openxmlformats.org/officeDocument/2006/relationships" xmlns:p="http://schemas.openxmlformats.org/presentationml/2006/main">
   <p:cSld>
     <p:spTree>
       <p:nvGrpSpPr>
@@ -6204,7 +6281,14 @@
         <p:cNvGrpSpPr/>
         <p:nvPr/>
       </p:nvGrpSpPr>
-      <p:grpSpPr/>
+      <p:grpSpPr>
+        <a:xfrm>
+          <a:off x="0" y="0"/>
+          <a:ext cx="0" cy="0"/>
+          <a:chOff x="0" y="0"/>
+          <a:chExt cx="0" cy="0"/>
+        </a:xfrm>
+      </p:grpSpPr>
       <p:sp>
         <p:nvSpPr>
           <p:cNvPr id="2" name="TextBox 1"/>
@@ -6222,7 +6306,7 @@
           <a:noFill/>
         </p:spPr>
         <p:txBody>
-          <a:bodyPr wrap="square" lIns="0" rIns="0" tIns="0" bIns="0" anchor="t">
+          <a:bodyPr wrap="square" lIns="0" tIns="0" rIns="0" bIns="0" anchor="t">
             <a:spAutoFit/>
           </a:bodyPr>
           <a:lstStyle/>
@@ -6266,7 +6350,7 @@
           <a:noFill/>
         </p:spPr>
         <p:txBody>
-          <a:bodyPr wrap="square" lIns="0" rIns="0" tIns="0" bIns="0" anchor="t">
+          <a:bodyPr wrap="square" lIns="0" tIns="0" rIns="0" bIns="0" anchor="t">
             <a:spAutoFit/>
           </a:bodyPr>
           <a:lstStyle/>
@@ -6330,10 +6414,11 @@
           </a:fontRef>
         </p:style>
         <p:txBody>
-          <a:bodyPr rtlCol="0" anchor="ctr" wrap="square" lIns="128016" rIns="128016" tIns="73152" bIns="73152"/>
+          <a:bodyPr wrap="square" lIns="128016" tIns="73152" rIns="128016" bIns="73152" rtlCol="0" anchor="ctr"/>
           <a:lstStyle/>
           <a:p>
             <a:pPr algn="ctr"/>
+            <a:endParaRPr/>
           </a:p>
         </p:txBody>
       </p:sp>
@@ -6374,10 +6459,11 @@
           </a:fontRef>
         </p:style>
         <p:txBody>
-          <a:bodyPr rtlCol="0" anchor="ctr" wrap="square" lIns="128016" rIns="128016" tIns="73152" bIns="73152"/>
+          <a:bodyPr wrap="square" lIns="128016" tIns="73152" rIns="128016" bIns="73152" rtlCol="0" anchor="ctr"/>
           <a:lstStyle/>
           <a:p>
             <a:pPr algn="ctr"/>
+            <a:endParaRPr/>
           </a:p>
         </p:txBody>
       </p:sp>
@@ -6398,7 +6484,7 @@
           <a:noFill/>
         </p:spPr>
         <p:txBody>
-          <a:bodyPr wrap="square" lIns="0" rIns="0" tIns="0" bIns="0" anchor="t">
+          <a:bodyPr wrap="square" lIns="0" tIns="0" rIns="0" bIns="0" anchor="t">
             <a:spAutoFit/>
           </a:bodyPr>
           <a:lstStyle/>
@@ -6439,7 +6525,7 @@
           <a:noFill/>
         </p:spPr>
         <p:txBody>
-          <a:bodyPr wrap="square" lIns="0" rIns="0" tIns="0" bIns="0" anchor="t">
+          <a:bodyPr wrap="square" lIns="0" tIns="0" rIns="0" bIns="0" anchor="t">
             <a:spAutoFit/>
           </a:bodyPr>
           <a:lstStyle/>
@@ -6581,10 +6667,11 @@
           </a:fontRef>
         </p:style>
         <p:txBody>
-          <a:bodyPr rtlCol="0" anchor="ctr" wrap="square" lIns="128016" rIns="128016" tIns="73152" bIns="73152"/>
+          <a:bodyPr wrap="square" lIns="128016" tIns="73152" rIns="128016" bIns="73152" rtlCol="0" anchor="ctr"/>
           <a:lstStyle/>
           <a:p>
             <a:pPr algn="ctr"/>
+            <a:endParaRPr/>
           </a:p>
         </p:txBody>
       </p:sp>
@@ -6625,10 +6712,11 @@
           </a:fontRef>
         </p:style>
         <p:txBody>
-          <a:bodyPr rtlCol="0" anchor="ctr" wrap="square" lIns="128016" rIns="128016" tIns="73152" bIns="73152"/>
+          <a:bodyPr wrap="square" lIns="128016" tIns="73152" rIns="128016" bIns="73152" rtlCol="0" anchor="ctr"/>
           <a:lstStyle/>
           <a:p>
             <a:pPr algn="ctr"/>
+            <a:endParaRPr/>
           </a:p>
         </p:txBody>
       </p:sp>
@@ -6649,7 +6737,7 @@
           <a:noFill/>
         </p:spPr>
         <p:txBody>
-          <a:bodyPr wrap="square" lIns="0" rIns="0" tIns="0" bIns="0" anchor="t">
+          <a:bodyPr wrap="square" lIns="0" tIns="0" rIns="0" bIns="0" anchor="t">
             <a:spAutoFit/>
           </a:bodyPr>
           <a:lstStyle/>
@@ -6690,7 +6778,7 @@
           <a:noFill/>
         </p:spPr>
         <p:txBody>
-          <a:bodyPr wrap="square" lIns="0" rIns="0" tIns="0" bIns="0" anchor="t">
+          <a:bodyPr wrap="square" lIns="0" tIns="0" rIns="0" bIns="0" anchor="t">
             <a:spAutoFit/>
           </a:bodyPr>
           <a:lstStyle/>
@@ -6832,10 +6920,11 @@
           </a:fontRef>
         </p:style>
         <p:txBody>
-          <a:bodyPr rtlCol="0" anchor="ctr" wrap="square" lIns="128016" rIns="128016" tIns="73152" bIns="73152"/>
+          <a:bodyPr wrap="square" lIns="128016" tIns="73152" rIns="128016" bIns="73152" rtlCol="0" anchor="ctr"/>
           <a:lstStyle/>
           <a:p>
             <a:pPr algn="ctr"/>
+            <a:endParaRPr/>
           </a:p>
         </p:txBody>
       </p:sp>
@@ -6876,10 +6965,11 @@
           </a:fontRef>
         </p:style>
         <p:txBody>
-          <a:bodyPr rtlCol="0" anchor="ctr" wrap="square" lIns="128016" rIns="128016" tIns="73152" bIns="73152"/>
+          <a:bodyPr wrap="square" lIns="128016" tIns="73152" rIns="128016" bIns="73152" rtlCol="0" anchor="ctr"/>
           <a:lstStyle/>
           <a:p>
             <a:pPr algn="ctr"/>
+            <a:endParaRPr/>
           </a:p>
         </p:txBody>
       </p:sp>
@@ -6900,7 +6990,7 @@
           <a:noFill/>
         </p:spPr>
         <p:txBody>
-          <a:bodyPr wrap="square" lIns="0" rIns="0" tIns="0" bIns="0" anchor="t">
+          <a:bodyPr wrap="square" lIns="0" tIns="0" rIns="0" bIns="0" anchor="t">
             <a:spAutoFit/>
           </a:bodyPr>
           <a:lstStyle/>
@@ -6941,7 +7031,7 @@
           <a:noFill/>
         </p:spPr>
         <p:txBody>
-          <a:bodyPr wrap="square" lIns="0" rIns="0" tIns="0" bIns="0" anchor="t">
+          <a:bodyPr wrap="square" lIns="0" tIns="0" rIns="0" bIns="0" anchor="t">
             <a:spAutoFit/>
           </a:bodyPr>
           <a:lstStyle/>
@@ -7083,10 +7173,11 @@
           </a:fontRef>
         </p:style>
         <p:txBody>
-          <a:bodyPr rtlCol="0" anchor="ctr" wrap="square" lIns="128016" rIns="128016" tIns="73152" bIns="73152"/>
+          <a:bodyPr wrap="square" lIns="128016" tIns="73152" rIns="128016" bIns="73152" rtlCol="0" anchor="ctr"/>
           <a:lstStyle/>
           <a:p>
             <a:pPr algn="ctr"/>
+            <a:endParaRPr/>
           </a:p>
         </p:txBody>
       </p:sp>
@@ -7127,10 +7218,11 @@
           </a:fontRef>
         </p:style>
         <p:txBody>
-          <a:bodyPr rtlCol="0" anchor="ctr" wrap="square" lIns="128016" rIns="128016" tIns="73152" bIns="73152"/>
+          <a:bodyPr wrap="square" lIns="128016" tIns="73152" rIns="128016" bIns="73152" rtlCol="0" anchor="ctr"/>
           <a:lstStyle/>
           <a:p>
             <a:pPr algn="ctr"/>
+            <a:endParaRPr/>
           </a:p>
         </p:txBody>
       </p:sp>
@@ -7151,7 +7243,7 @@
           <a:noFill/>
         </p:spPr>
         <p:txBody>
-          <a:bodyPr wrap="square" lIns="0" rIns="0" tIns="0" bIns="0" anchor="t">
+          <a:bodyPr wrap="square" lIns="0" tIns="0" rIns="0" bIns="0" anchor="t">
             <a:spAutoFit/>
           </a:bodyPr>
           <a:lstStyle/>
@@ -7192,7 +7284,7 @@
           <a:noFill/>
         </p:spPr>
         <p:txBody>
-          <a:bodyPr wrap="square" lIns="0" rIns="0" tIns="0" bIns="0" anchor="t">
+          <a:bodyPr wrap="square" lIns="0" tIns="0" rIns="0" bIns="0" anchor="t">
             <a:spAutoFit/>
           </a:bodyPr>
           <a:lstStyle/>
@@ -7298,7 +7390,7 @@
           </a:fontRef>
         </p:style>
         <p:txBody>
-          <a:bodyPr rtlCol="0" anchor="ctr" wrap="square" lIns="128016" rIns="128016" tIns="73152" bIns="73152"/>
+          <a:bodyPr wrap="square" lIns="128016" tIns="73152" rIns="128016" bIns="73152" rtlCol="0" anchor="ctr"/>
           <a:lstStyle/>
           <a:p>
             <a:pPr algn="ctr">
@@ -7334,7 +7426,7 @@
         </p:xfrm>
         <a:graphic>
           <a:graphicData uri="http://schemas.openxmlformats.org/drawingml/2006/chart">
-            <c:chart xmlns:c="http://schemas.openxmlformats.org/drawingml/2006/chart" r:id="rId2"/>
+            <c:chart xmlns:c="http://schemas.openxmlformats.org/drawingml/2006/chart" xmlns:r="http://schemas.openxmlformats.org/officeDocument/2006/relationships" r:id="rId2"/>
           </a:graphicData>
         </a:graphic>
       </p:graphicFrame>
@@ -7355,7 +7447,7 @@
           <a:noFill/>
         </p:spPr>
         <p:txBody>
-          <a:bodyPr wrap="square" lIns="0" rIns="0" tIns="0" bIns="0" anchor="t">
+          <a:bodyPr wrap="square" lIns="0" tIns="0" rIns="0" bIns="0" anchor="t">
             <a:spAutoFit/>
           </a:bodyPr>
           <a:lstStyle/>
@@ -7454,7 +7546,7 @@
           </a:fontRef>
         </p:style>
         <p:txBody>
-          <a:bodyPr rtlCol="0" anchor="ctr" wrap="square" lIns="128016" rIns="128016" tIns="73152" bIns="73152"/>
+          <a:bodyPr wrap="square" lIns="128016" tIns="73152" rIns="128016" bIns="73152" rtlCol="0" anchor="ctr"/>
           <a:lstStyle/>
           <a:p>
             <a:pPr algn="ctr">
@@ -7493,7 +7585,7 @@
           <a:noFill/>
         </p:spPr>
         <p:txBody>
-          <a:bodyPr wrap="square" lIns="0" rIns="0" tIns="0" bIns="0" anchor="t">
+          <a:bodyPr wrap="square" lIns="0" tIns="0" rIns="0" bIns="0" anchor="t">
             <a:spAutoFit/>
           </a:bodyPr>
           <a:lstStyle/>
@@ -7633,7 +7725,7 @@
           <a:noFill/>
         </p:spPr>
         <p:txBody>
-          <a:bodyPr wrap="square" lIns="0" rIns="0" tIns="0" bIns="0" anchor="t">
+          <a:bodyPr wrap="square" lIns="0" tIns="0" rIns="0" bIns="0" anchor="t">
             <a:spAutoFit/>
           </a:bodyPr>
           <a:lstStyle/>
@@ -7677,7 +7769,7 @@
           <a:noFill/>
         </p:spPr>
         <p:txBody>
-          <a:bodyPr wrap="square" lIns="0" rIns="0" tIns="0" bIns="0" anchor="t">
+          <a:bodyPr wrap="square" lIns="0" tIns="0" rIns="0" bIns="0" anchor="t">
             <a:spAutoFit/>
           </a:bodyPr>
           <a:lstStyle/>
@@ -7710,7 +7802,7 @@
 </file>
 
 <file path=ppt/slides/slide5.xml><?xml version="1.0" encoding="utf-8"?>
-<p:sld xmlns:a="http://schemas.openxmlformats.org/drawingml/2006/main" xmlns:p="http://schemas.openxmlformats.org/presentationml/2006/main" xmlns:r="http://schemas.openxmlformats.org/officeDocument/2006/relationships">
+<p:sld xmlns:a="http://schemas.openxmlformats.org/drawingml/2006/main" xmlns:r="http://schemas.openxmlformats.org/officeDocument/2006/relationships" xmlns:p="http://schemas.openxmlformats.org/presentationml/2006/main">
   <p:cSld>
     <p:spTree>
       <p:nvGrpSpPr>
@@ -7718,7 +7810,14 @@
         <p:cNvGrpSpPr/>
         <p:nvPr/>
       </p:nvGrpSpPr>
-      <p:grpSpPr/>
+      <p:grpSpPr>
+        <a:xfrm>
+          <a:off x="0" y="0"/>
+          <a:ext cx="0" cy="0"/>
+          <a:chOff x="0" y="0"/>
+          <a:chExt cx="0" cy="0"/>
+        </a:xfrm>
+      </p:grpSpPr>
       <p:sp>
         <p:nvSpPr>
           <p:cNvPr id="2" name="TextBox 1"/>
@@ -7736,7 +7835,7 @@
           <a:noFill/>
         </p:spPr>
         <p:txBody>
-          <a:bodyPr wrap="square" lIns="0" rIns="0" tIns="0" bIns="0" anchor="t">
+          <a:bodyPr wrap="square" lIns="0" tIns="0" rIns="0" bIns="0" anchor="t">
             <a:spAutoFit/>
           </a:bodyPr>
           <a:lstStyle/>
@@ -7780,7 +7879,7 @@
           <a:noFill/>
         </p:spPr>
         <p:txBody>
-          <a:bodyPr wrap="square" lIns="0" rIns="0" tIns="0" bIns="0" anchor="t">
+          <a:bodyPr wrap="square" lIns="0" tIns="0" rIns="0" bIns="0" anchor="t">
             <a:spAutoFit/>
           </a:bodyPr>
           <a:lstStyle/>
@@ -7844,10 +7943,11 @@
           </a:fontRef>
         </p:style>
         <p:txBody>
-          <a:bodyPr rtlCol="0" anchor="ctr" wrap="square" lIns="128016" rIns="128016" tIns="73152" bIns="73152"/>
+          <a:bodyPr wrap="square" lIns="128016" tIns="73152" rIns="128016" bIns="73152" rtlCol="0" anchor="ctr"/>
           <a:lstStyle/>
           <a:p>
             <a:pPr algn="ctr"/>
+            <a:endParaRPr/>
           </a:p>
         </p:txBody>
       </p:sp>
@@ -7888,10 +7988,11 @@
           </a:fontRef>
         </p:style>
         <p:txBody>
-          <a:bodyPr rtlCol="0" anchor="ctr" wrap="square" lIns="128016" rIns="128016" tIns="73152" bIns="73152"/>
+          <a:bodyPr wrap="square" lIns="128016" tIns="73152" rIns="128016" bIns="73152" rtlCol="0" anchor="ctr"/>
           <a:lstStyle/>
           <a:p>
             <a:pPr algn="ctr"/>
+            <a:endParaRPr/>
           </a:p>
         </p:txBody>
       </p:sp>
@@ -7912,7 +8013,7 @@
           <a:noFill/>
         </p:spPr>
         <p:txBody>
-          <a:bodyPr wrap="square" lIns="0" rIns="0" tIns="0" bIns="0" anchor="t">
+          <a:bodyPr wrap="square" lIns="0" tIns="0" rIns="0" bIns="0" anchor="t">
             <a:spAutoFit/>
           </a:bodyPr>
           <a:lstStyle/>
@@ -7953,7 +8054,7 @@
           <a:noFill/>
         </p:spPr>
         <p:txBody>
-          <a:bodyPr wrap="square" lIns="0" rIns="0" tIns="0" bIns="0" anchor="t">
+          <a:bodyPr wrap="square" lIns="0" tIns="0" rIns="0" bIns="0" anchor="t">
             <a:spAutoFit/>
           </a:bodyPr>
           <a:lstStyle/>
@@ -8060,7 +8161,7 @@
           <a:noFill/>
         </p:spPr>
         <p:txBody>
-          <a:bodyPr wrap="square" lIns="0" rIns="0" tIns="0" bIns="0" anchor="t">
+          <a:bodyPr wrap="square" lIns="0" tIns="0" rIns="0" bIns="0" anchor="t">
             <a:spAutoFit/>
           </a:bodyPr>
           <a:lstStyle/>
@@ -8121,10 +8222,11 @@
           </a:fontRef>
         </p:style>
         <p:txBody>
-          <a:bodyPr rtlCol="0" anchor="ctr" wrap="square" lIns="128016" rIns="128016" tIns="73152" bIns="73152"/>
+          <a:bodyPr wrap="square" lIns="128016" tIns="73152" rIns="128016" bIns="73152" rtlCol="0" anchor="ctr"/>
           <a:lstStyle/>
           <a:p>
             <a:pPr algn="ctr"/>
+            <a:endParaRPr/>
           </a:p>
         </p:txBody>
       </p:sp>
@@ -8165,10 +8267,11 @@
           </a:fontRef>
         </p:style>
         <p:txBody>
-          <a:bodyPr rtlCol="0" anchor="ctr" wrap="square" lIns="128016" rIns="128016" tIns="73152" bIns="73152"/>
+          <a:bodyPr wrap="square" lIns="128016" tIns="73152" rIns="128016" bIns="73152" rtlCol="0" anchor="ctr"/>
           <a:lstStyle/>
           <a:p>
             <a:pPr algn="ctr"/>
+            <a:endParaRPr/>
           </a:p>
         </p:txBody>
       </p:sp>
@@ -8189,7 +8292,7 @@
           <a:noFill/>
         </p:spPr>
         <p:txBody>
-          <a:bodyPr wrap="square" lIns="0" rIns="0" tIns="0" bIns="0" anchor="t">
+          <a:bodyPr wrap="square" lIns="0" tIns="0" rIns="0" bIns="0" anchor="t">
             <a:spAutoFit/>
           </a:bodyPr>
           <a:lstStyle/>
@@ -8230,7 +8333,7 @@
           <a:noFill/>
         </p:spPr>
         <p:txBody>
-          <a:bodyPr wrap="square" lIns="0" rIns="0" tIns="0" bIns="0" anchor="t">
+          <a:bodyPr wrap="square" lIns="0" tIns="0" rIns="0" bIns="0" anchor="t">
             <a:spAutoFit/>
           </a:bodyPr>
           <a:lstStyle/>
@@ -8337,7 +8440,7 @@
           <a:noFill/>
         </p:spPr>
         <p:txBody>
-          <a:bodyPr wrap="square" lIns="0" rIns="0" tIns="0" bIns="0" anchor="t">
+          <a:bodyPr wrap="square" lIns="0" tIns="0" rIns="0" bIns="0" anchor="t">
             <a:spAutoFit/>
           </a:bodyPr>
           <a:lstStyle/>
@@ -8398,10 +8501,11 @@
           </a:fontRef>
         </p:style>
         <p:txBody>
-          <a:bodyPr rtlCol="0" anchor="ctr" wrap="square" lIns="128016" rIns="128016" tIns="73152" bIns="73152"/>
+          <a:bodyPr wrap="square" lIns="128016" tIns="73152" rIns="128016" bIns="73152" rtlCol="0" anchor="ctr"/>
           <a:lstStyle/>
           <a:p>
             <a:pPr algn="ctr"/>
+            <a:endParaRPr/>
           </a:p>
         </p:txBody>
       </p:sp>
@@ -8442,10 +8546,11 @@
           </a:fontRef>
         </p:style>
         <p:txBody>
-          <a:bodyPr rtlCol="0" anchor="ctr" wrap="square" lIns="128016" rIns="128016" tIns="73152" bIns="73152"/>
+          <a:bodyPr wrap="square" lIns="128016" tIns="73152" rIns="128016" bIns="73152" rtlCol="0" anchor="ctr"/>
           <a:lstStyle/>
           <a:p>
             <a:pPr algn="ctr"/>
+            <a:endParaRPr/>
           </a:p>
         </p:txBody>
       </p:sp>
@@ -8466,7 +8571,7 @@
           <a:noFill/>
         </p:spPr>
         <p:txBody>
-          <a:bodyPr wrap="square" lIns="0" rIns="0" tIns="0" bIns="0" anchor="t">
+          <a:bodyPr wrap="square" lIns="0" tIns="0" rIns="0" bIns="0" anchor="t">
             <a:spAutoFit/>
           </a:bodyPr>
           <a:lstStyle/>
@@ -8507,7 +8612,7 @@
           <a:noFill/>
         </p:spPr>
         <p:txBody>
-          <a:bodyPr wrap="square" lIns="0" rIns="0" tIns="0" bIns="0" anchor="t">
+          <a:bodyPr wrap="square" lIns="0" tIns="0" rIns="0" bIns="0" anchor="t">
             <a:spAutoFit/>
           </a:bodyPr>
           <a:lstStyle/>
@@ -8614,7 +8719,7 @@
           <a:noFill/>
         </p:spPr>
         <p:txBody>
-          <a:bodyPr wrap="square" lIns="0" rIns="0" tIns="0" bIns="0" anchor="t">
+          <a:bodyPr wrap="square" lIns="0" tIns="0" rIns="0" bIns="0" anchor="t">
             <a:spAutoFit/>
           </a:bodyPr>
           <a:lstStyle/>
@@ -8655,7 +8760,7 @@
           <a:noFill/>
         </p:spPr>
         <p:txBody>
-          <a:bodyPr wrap="square" lIns="0" rIns="0" tIns="0" bIns="0" anchor="t">
+          <a:bodyPr wrap="square" lIns="0" tIns="0" rIns="0" bIns="0" anchor="t">
             <a:spAutoFit/>
           </a:bodyPr>
           <a:lstStyle/>
@@ -8737,7 +8842,7 @@
           </a:fontRef>
         </p:style>
         <p:txBody>
-          <a:bodyPr rtlCol="0" anchor="ctr" wrap="square" lIns="128016" rIns="128016" tIns="73152" bIns="73152"/>
+          <a:bodyPr wrap="square" lIns="128016" tIns="73152" rIns="128016" bIns="73152" rtlCol="0" anchor="ctr"/>
           <a:lstStyle/>
           <a:p>
             <a:pPr algn="ctr">
@@ -8776,7 +8881,7 @@
           <a:noFill/>
         </p:spPr>
         <p:txBody>
-          <a:bodyPr wrap="square" lIns="0" rIns="0" tIns="0" bIns="0" anchor="t">
+          <a:bodyPr wrap="square" lIns="0" tIns="0" rIns="0" bIns="0" anchor="t">
             <a:spAutoFit/>
           </a:bodyPr>
           <a:lstStyle/>
@@ -8820,7 +8925,7 @@
           <a:noFill/>
         </p:spPr>
         <p:txBody>
-          <a:bodyPr wrap="square" lIns="0" rIns="0" tIns="0" bIns="0" anchor="t">
+          <a:bodyPr wrap="square" lIns="0" tIns="0" rIns="0" bIns="0" anchor="t">
             <a:spAutoFit/>
           </a:bodyPr>
           <a:lstStyle/>
